--- a/materials/OS-M3/OS-M3-S1-Zotero/OS-M3-S1-Zotero-slides.pptx
+++ b/materials/OS-M3/OS-M3-S1-Zotero/OS-M3-S1-Zotero-slides.pptx
@@ -5413,7 +5413,7 @@
             </a:pPr>
             <a:r>
               <a:rPr/>
-              <a:t>09/01/2026</a:t>
+              <a:t>11/01/2026</a:t>
             </a:r>
           </a:p>
         </p:txBody>

--- a/materials/OS-M3/OS-M3-S1-Zotero/OS-M3-S1-Zotero-slides.pptx
+++ b/materials/OS-M3/OS-M3-S1-Zotero/OS-M3-S1-Zotero-slides.pptx
@@ -5413,7 +5413,7 @@
             </a:pPr>
             <a:r>
               <a:rPr/>
-              <a:t>11/01/2026</a:t>
+              <a:t>16/01/2026</a:t>
             </a:r>
           </a:p>
         </p:txBody>

--- a/materials/OS-M3/OS-M3-S1-Zotero/OS-M3-S1-Zotero-slides.pptx
+++ b/materials/OS-M3/OS-M3-S1-Zotero/OS-M3-S1-Zotero-slides.pptx
@@ -5413,7 +5413,7 @@
             </a:pPr>
             <a:r>
               <a:rPr/>
-              <a:t>16/01/2026</a:t>
+              <a:t>18/01/2026</a:t>
             </a:r>
           </a:p>
         </p:txBody>

--- a/materials/OS-M3/OS-M3-S1-Zotero/OS-M3-S1-Zotero-slides.pptx
+++ b/materials/OS-M3/OS-M3-S1-Zotero/OS-M3-S1-Zotero-slides.pptx
@@ -5413,7 +5413,7 @@
             </a:pPr>
             <a:r>
               <a:rPr/>
-              <a:t>18/01/2026</a:t>
+              <a:t>22/01/2026</a:t>
             </a:r>
           </a:p>
         </p:txBody>

--- a/materials/OS-M3/OS-M3-S1-Zotero/OS-M3-S1-Zotero-slides.pptx
+++ b/materials/OS-M3/OS-M3-S1-Zotero/OS-M3-S1-Zotero-slides.pptx
@@ -5413,7 +5413,7 @@
             </a:pPr>
             <a:r>
               <a:rPr/>
-              <a:t>22/01/2026</a:t>
+              <a:t>23/01/2026</a:t>
             </a:r>
           </a:p>
         </p:txBody>

--- a/materials/OS-M3/OS-M3-S1-Zotero/OS-M3-S1-Zotero-slides.pptx
+++ b/materials/OS-M3/OS-M3-S1-Zotero/OS-M3-S1-Zotero-slides.pptx
@@ -5413,7 +5413,7 @@
             </a:pPr>
             <a:r>
               <a:rPr/>
-              <a:t>23/01/2026</a:t>
+              <a:t>25/01/2026</a:t>
             </a:r>
           </a:p>
         </p:txBody>

--- a/materials/OS-M3/OS-M3-S1-Zotero/OS-M3-S1-Zotero-slides.pptx
+++ b/materials/OS-M3/OS-M3-S1-Zotero/OS-M3-S1-Zotero-slides.pptx
@@ -5413,7 +5413,7 @@
             </a:pPr>
             <a:r>
               <a:rPr/>
-              <a:t>25/01/2026</a:t>
+              <a:t>28/01/2026</a:t>
             </a:r>
           </a:p>
         </p:txBody>

--- a/materials/OS-M3/OS-M3-S1-Zotero/OS-M3-S1-Zotero-slides.pptx
+++ b/materials/OS-M3/OS-M3-S1-Zotero/OS-M3-S1-Zotero-slides.pptx
@@ -5413,7 +5413,7 @@
             </a:pPr>
             <a:r>
               <a:rPr/>
-              <a:t>28/01/2026</a:t>
+              <a:t>29/01/2026</a:t>
             </a:r>
           </a:p>
         </p:txBody>

--- a/materials/OS-M3/OS-M3-S1-Zotero/OS-M3-S1-Zotero-slides.pptx
+++ b/materials/OS-M3/OS-M3-S1-Zotero/OS-M3-S1-Zotero-slides.pptx
@@ -5413,7 +5413,7 @@
             </a:pPr>
             <a:r>
               <a:rPr/>
-              <a:t>29/01/2026</a:t>
+              <a:t>01/02/2026</a:t>
             </a:r>
           </a:p>
         </p:txBody>

--- a/materials/OS-M3/OS-M3-S1-Zotero/OS-M3-S1-Zotero-slides.pptx
+++ b/materials/OS-M3/OS-M3-S1-Zotero/OS-M3-S1-Zotero-slides.pptx
@@ -5413,7 +5413,7 @@
             </a:pPr>
             <a:r>
               <a:rPr/>
-              <a:t>01/02/2026</a:t>
+              <a:t>05/02/2026</a:t>
             </a:r>
           </a:p>
         </p:txBody>

--- a/materials/OS-M3/OS-M3-S1-Zotero/OS-M3-S1-Zotero-slides.pptx
+++ b/materials/OS-M3/OS-M3-S1-Zotero/OS-M3-S1-Zotero-slides.pptx
@@ -5413,7 +5413,7 @@
             </a:pPr>
             <a:r>
               <a:rPr/>
-              <a:t>05/02/2026</a:t>
+              <a:t>08/02/2026</a:t>
             </a:r>
           </a:p>
         </p:txBody>

--- a/materials/OS-M3/OS-M3-S1-Zotero/OS-M3-S1-Zotero-slides.pptx
+++ b/materials/OS-M3/OS-M3-S1-Zotero/OS-M3-S1-Zotero-slides.pptx
@@ -5413,7 +5413,7 @@
             </a:pPr>
             <a:r>
               <a:rPr/>
-              <a:t>08/02/2026</a:t>
+              <a:t>11/02/2026</a:t>
             </a:r>
           </a:p>
         </p:txBody>

--- a/materials/OS-M3/OS-M3-S1-Zotero/OS-M3-S1-Zotero-slides.pptx
+++ b/materials/OS-M3/OS-M3-S1-Zotero/OS-M3-S1-Zotero-slides.pptx
@@ -5413,7 +5413,7 @@
             </a:pPr>
             <a:r>
               <a:rPr/>
-              <a:t>11/02/2026</a:t>
+              <a:t>12/02/2026</a:t>
             </a:r>
           </a:p>
         </p:txBody>

--- a/materials/OS-M3/OS-M3-S1-Zotero/OS-M3-S1-Zotero-slides.pptx
+++ b/materials/OS-M3/OS-M3-S1-Zotero/OS-M3-S1-Zotero-slides.pptx
@@ -5413,7 +5413,7 @@
             </a:pPr>
             <a:r>
               <a:rPr/>
-              <a:t>12/02/2026</a:t>
+              <a:t>13/02/2026</a:t>
             </a:r>
           </a:p>
         </p:txBody>

--- a/materials/OS-M3/OS-M3-S1-Zotero/OS-M3-S1-Zotero-slides.pptx
+++ b/materials/OS-M3/OS-M3-S1-Zotero/OS-M3-S1-Zotero-slides.pptx
@@ -5413,7 +5413,7 @@
             </a:pPr>
             <a:r>
               <a:rPr/>
-              <a:t>13/02/2026</a:t>
+              <a:t>15/02/2026</a:t>
             </a:r>
           </a:p>
         </p:txBody>

--- a/materials/OS-M3/OS-M3-S1-Zotero/OS-M3-S1-Zotero-slides.pptx
+++ b/materials/OS-M3/OS-M3-S1-Zotero/OS-M3-S1-Zotero-slides.pptx
@@ -5413,7 +5413,7 @@
             </a:pPr>
             <a:r>
               <a:rPr/>
-              <a:t>15/02/2026</a:t>
+              <a:t>18/02/2026</a:t>
             </a:r>
           </a:p>
         </p:txBody>

--- a/materials/OS-M3/OS-M3-S1-Zotero/OS-M3-S1-Zotero-slides.pptx
+++ b/materials/OS-M3/OS-M3-S1-Zotero/OS-M3-S1-Zotero-slides.pptx
@@ -5413,7 +5413,7 @@
             </a:pPr>
             <a:r>
               <a:rPr/>
-              <a:t>18/02/2026</a:t>
+              <a:t>22/02/2026</a:t>
             </a:r>
           </a:p>
         </p:txBody>

--- a/materials/OS-M3/OS-M3-S1-Zotero/OS-M3-S1-Zotero-slides.pptx
+++ b/materials/OS-M3/OS-M3-S1-Zotero/OS-M3-S1-Zotero-slides.pptx
@@ -5413,7 +5413,7 @@
             </a:pPr>
             <a:r>
               <a:rPr/>
-              <a:t>22/02/2026</a:t>
+              <a:t>01/03/2026</a:t>
             </a:r>
           </a:p>
         </p:txBody>
